--- a/static_files/laboratory/实验基础1.pptx
+++ b/static_files/laboratory/实验基础1.pptx
@@ -13051,7 +13051,7 @@
                 </a:solidFill>
                 <a:latin typeface="Times New Roman" panose="02020603050405020304" pitchFamily="18" charset="0"/>
               </a:rPr>
-              <a:t>www.baidu.com</a:t>
+              <a:t>8.8.8.8</a:t>
             </a:r>
             <a:endParaRPr lang="en-US" altLang="zh-CN" dirty="0">
               <a:solidFill>
@@ -13074,7 +13074,7 @@
                 </a:solidFill>
                 <a:latin typeface="Times New Roman" panose="02020603050405020304" pitchFamily="18" charset="0"/>
               </a:rPr>
-              <a:t>tracert -d www.baidu.com</a:t>
+              <a:t>tracert -d 8.8.8.8</a:t>
             </a:r>
             <a:endParaRPr lang="en-US" altLang="zh-CN" dirty="0">
               <a:solidFill>
